--- a/artifacts/speaking-portfolio-expanded/decks/evidence-learning-30min-screen.pptx
+++ b/artifacts/speaking-portfolio-expanded/decks/evidence-learning-30min-screen.pptx
@@ -908,7 +908,7 @@
                 <a:ea typeface="Arial"/>
                 <a:cs typeface="Arial"/>
               </a:rPr>
-              <a:t xml:space="preserve">And know what you are up against when you read the model's summary instead of the transcript. Skitka and colleagues measured it in 1999: people given a highly but imperfectly reliable aid did worse than people given no aid at all, because it is right often enough that you stop checking. The summary is a place to start looking, never a place to stop.</a:t>
+              <a:t xml:space="preserve">And know what you are up against when you read the model's summary instead of the transcript. Skitka and colleagues measured it in 1999: people given a highly but imperfectly reliable aid did worse than people with no aid at all on the trials where the aid was wrong, because it is right often enough that you stop checking. The summary is a place to start looking, never a place to stop.</a:t>
             </a:r>
             <a:endParaRPr lang="en-US" sz="1200"/>
           </a:p>
@@ -2970,7 +2970,7 @@
                 <a:ea typeface="Arial"/>
                 <a:cs typeface="Arial"/>
               </a:rPr>
-              <a:t xml:space="preserve">The detector is the same trap in software. Liang and colleagues found the detectors they tested flagged non-native English writers at alarming rates. And even if a detector were perfect, it answers the wrong question. Who typed the sentence is not whether the kid can do the thing.</a:t>
+              <a:t xml:space="preserve">The detector is the same trap in software. Liang and colleagues found the detectors they tested flagged non-native English writers at alarming rates. And even if a detector were perfect, it answers the wrong question. Who typed the sentence is not whether the kid can do the thing. And if your assessment depends on knowing who typed a paragraph, the detector has become part of your curriculum.</a:t>
             </a:r>
             <a:endParaRPr lang="en-US" sz="1200"/>
           </a:p>
@@ -3543,6 +3543,52 @@
                 <a:ea typeface="Arial"/>
                 <a:cs typeface="Arial"/>
               </a:rPr>
+              <a:t xml:space="preserve">Koedinger and Aleven (2007), [Exploring the Assistance Dilemma in Experiments with Cognitive Tutors](https://doi.org/10.1007/s10648-007-9049-0), Educational Psychology Review 19(3), 239 to 264.</a:t>
+            </a:r>
+            <a:endParaRPr lang="en-US" sz="1200"/>
+          </a:p>
+          <a:p>
+            <a:pPr marL="0" indent="0">
+              <a:lnSpc>
+                <a:spcPts val="1560"/>
+              </a:lnSpc>
+              <a:spcAft>
+                <a:spcPts val="0"/>
+              </a:spcAft>
+              <a:buNone/>
+            </a:pPr>
+            <a:r>
+              <a:rPr lang="en-US" sz="1200" b="0">
+                <a:solidFill>
+                  <a:srgbClr val="202b33"/>
+                </a:solidFill>
+                <a:latin typeface="Arial"/>
+                <a:ea typeface="Arial"/>
+                <a:cs typeface="Arial"/>
+              </a:rPr>
+              <a:t xml:space="preserve"/>
+            </a:r>
+            <a:endParaRPr lang="en-US" sz="1200"/>
+          </a:p>
+          <a:p>
+            <a:pPr marL="0" indent="0">
+              <a:lnSpc>
+                <a:spcPts val="1560"/>
+              </a:lnSpc>
+              <a:spcAft>
+                <a:spcPts val="0"/>
+              </a:spcAft>
+              <a:buNone/>
+            </a:pPr>
+            <a:r>
+              <a:rPr lang="en-US" sz="1200" b="0">
+                <a:solidFill>
+                  <a:srgbClr val="202b33"/>
+                </a:solidFill>
+                <a:latin typeface="Arial"/>
+                <a:ea typeface="Arial"/>
+                <a:cs typeface="Arial"/>
+              </a:rPr>
               <a:t xml:space="preserve"/>
             </a:r>
             <a:endParaRPr lang="en-US" sz="1200"/>
@@ -3978,52 +4024,6 @@
                 <a:ea typeface="Arial"/>
                 <a:cs typeface="Arial"/>
               </a:rPr>
-              <a:t xml:space="preserve">Koedinger and Aleven (2007), [Exploring the Assistance Dilemma in Experiments with Cognitive Tutors](https://doi.org/10.1007/s10648-007-9049-0), Educational Psychology Review 19(3), 239 to 264. Cited on slide 3.</a:t>
-            </a:r>
-            <a:endParaRPr lang="en-US" sz="1200"/>
-          </a:p>
-          <a:p>
-            <a:pPr marL="0" indent="0">
-              <a:lnSpc>
-                <a:spcPts val="1560"/>
-              </a:lnSpc>
-              <a:spcAft>
-                <a:spcPts val="0"/>
-              </a:spcAft>
-              <a:buNone/>
-            </a:pPr>
-            <a:r>
-              <a:rPr lang="en-US" sz="1200" b="0">
-                <a:solidFill>
-                  <a:srgbClr val="202b33"/>
-                </a:solidFill>
-                <a:latin typeface="Arial"/>
-                <a:ea typeface="Arial"/>
-                <a:cs typeface="Arial"/>
-              </a:rPr>
-              <a:t xml:space="preserve"/>
-            </a:r>
-            <a:endParaRPr lang="en-US" sz="1200"/>
-          </a:p>
-          <a:p>
-            <a:pPr marL="0" indent="0">
-              <a:lnSpc>
-                <a:spcPts val="1560"/>
-              </a:lnSpc>
-              <a:spcAft>
-                <a:spcPts val="0"/>
-              </a:spcAft>
-              <a:buNone/>
-            </a:pPr>
-            <a:r>
-              <a:rPr lang="en-US" sz="1200" b="0">
-                <a:solidFill>
-                  <a:srgbClr val="202b33"/>
-                </a:solidFill>
-                <a:latin typeface="Arial"/>
-                <a:ea typeface="Arial"/>
-                <a:cs typeface="Arial"/>
-              </a:rPr>
               <a:t xml:space="preserve"/>
             </a:r>
             <a:endParaRPr lang="en-US" sz="1200"/>
@@ -5329,7 +5329,7 @@
                 <a:ea typeface="Arial"/>
                 <a:cs typeface="Arial"/>
               </a:rPr>
-              <a:t xml:space="preserve">Run the two scripted learners from the runbook, then go live. Reveal the wrong argument. Let the room find the base. Reveal $120 only after the diagnostic question. Ask for $96 and one sentence explaining it.</a:t>
+              <a:t xml:space="preserve">Run the scripted tutor turns — from the kit or read off the card — then go live. Reveal the wrong argument. Let the room find the base. Reveal $120 only after the diagnostic question. Ask for $96 and one sentence explaining it.</a:t>
             </a:r>
             <a:endParaRPr lang="en-US" sz="1200"/>
           </a:p>
@@ -5421,99 +5421,53 @@
                 <a:ea typeface="Arial"/>
                 <a:cs typeface="Arial"/>
               </a:rPr>
-              <a:t xml:space="preserve">If the room is quiet, present the prepared learner response. Never pressure an individual into a public assessment.</a:t>
-            </a:r>
-            <a:endParaRPr lang="en-US" sz="1200"/>
-          </a:p>
-          <a:p>
-            <a:pPr marL="0" indent="0">
-              <a:lnSpc>
-                <a:spcPts val="1560"/>
-              </a:lnSpc>
-              <a:spcAft>
-                <a:spcPts val="0"/>
-              </a:spcAft>
-              <a:buNone/>
-            </a:pPr>
-            <a:r>
-              <a:rPr lang="en-US" sz="1200" b="0">
-                <a:solidFill>
-                  <a:srgbClr val="202b33"/>
-                </a:solidFill>
-                <a:latin typeface="Arial"/>
-                <a:ea typeface="Arial"/>
-                <a:cs typeface="Arial"/>
-              </a:rPr>
-              <a:t xml:space="preserve"/>
-            </a:r>
-            <a:endParaRPr lang="en-US" sz="1200"/>
-          </a:p>
-          <a:p>
-            <a:pPr marL="0" indent="0">
-              <a:lnSpc>
-                <a:spcPts val="1560"/>
-              </a:lnSpc>
-              <a:spcAft>
-                <a:spcPts val="0"/>
-              </a:spcAft>
-              <a:buNone/>
-            </a:pPr>
-            <a:r>
-              <a:rPr lang="en-US" sz="1200" b="0">
-                <a:solidFill>
-                  <a:srgbClr val="202b33"/>
-                </a:solidFill>
-                <a:latin typeface="Arial"/>
-                <a:ea typeface="Arial"/>
-                <a:cs typeface="Arial"/>
-              </a:rPr>
-              <a:t xml:space="preserve"/>
-            </a:r>
-            <a:endParaRPr lang="en-US" sz="1200"/>
-          </a:p>
-          <a:p>
-            <a:pPr marL="0" indent="0">
-              <a:lnSpc>
-                <a:spcPts val="1560"/>
-              </a:lnSpc>
-              <a:spcAft>
-                <a:spcPts val="0"/>
-              </a:spcAft>
-              <a:buNone/>
-            </a:pPr>
-            <a:r>
-              <a:rPr lang="en-US" sz="1200" b="0">
-                <a:solidFill>
-                  <a:srgbClr val="202b33"/>
-                </a:solidFill>
-                <a:latin typeface="Arial"/>
-                <a:ea typeface="Arial"/>
-                <a:cs typeface="Arial"/>
-              </a:rPr>
-              <a:t xml:space="preserve"/>
-            </a:r>
-            <a:endParaRPr lang="en-US" sz="1200"/>
-          </a:p>
-          <a:p>
-            <a:pPr marL="0" indent="0">
-              <a:lnSpc>
-                <a:spcPts val="1560"/>
-              </a:lnSpc>
-              <a:spcAft>
-                <a:spcPts val="0"/>
-              </a:spcAft>
-              <a:buNone/>
-            </a:pPr>
-            <a:r>
-              <a:rPr lang="en-US" sz="1200" b="0">
-                <a:solidFill>
-                  <a:srgbClr val="202b33"/>
-                </a:solidFill>
-                <a:latin typeface="Arial"/>
-                <a:ea typeface="Arial"/>
-                <a:cs typeface="Arial"/>
-              </a:rPr>
-              <a:t xml:space="preserve">Runbook section 5 for the scripted turns. Two-minute compression: skip the kit, run only the $100 sequence, state the $80 item.</a:t>
+              <a:t xml:space="preserve"/>
+            </a:r>
+            <a:endParaRPr lang="en-US" sz="1200"/>
+          </a:p>
+          <a:p>
+            <a:pPr marL="0" indent="0">
+              <a:lnSpc>
+                <a:spcPts val="1560"/>
+              </a:lnSpc>
+              <a:spcAft>
+                <a:spcPts val="0"/>
+              </a:spcAft>
+              <a:buNone/>
+            </a:pPr>
+            <a:r>
+              <a:rPr lang="en-US" sz="1200" b="0">
+                <a:solidFill>
+                  <a:srgbClr val="202b33"/>
+                </a:solidFill>
+                <a:latin typeface="Arial"/>
+                <a:ea typeface="Arial"/>
+                <a:cs typeface="Arial"/>
+              </a:rPr>
+              <a:t xml:space="preserve"/>
+            </a:r>
+            <a:endParaRPr lang="en-US" sz="1200"/>
+          </a:p>
+          <a:p>
+            <a:pPr marL="0" indent="0">
+              <a:lnSpc>
+                <a:spcPts val="1560"/>
+              </a:lnSpc>
+              <a:spcAft>
+                <a:spcPts val="0"/>
+              </a:spcAft>
+              <a:buNone/>
+            </a:pPr>
+            <a:r>
+              <a:rPr lang="en-US" sz="1200" b="0">
+                <a:solidFill>
+                  <a:srgbClr val="202b33"/>
+                </a:solidFill>
+                <a:latin typeface="Arial"/>
+                <a:ea typeface="Arial"/>
+                <a:cs typeface="Arial"/>
+              </a:rPr>
+              <a:t xml:space="preserve">Runbook section 5 has the five scripted turns and the same table in print. If the room is quiet, present the prepared learner response; never pressure an individual into a public assessment. Two-minute compression: skip the kit, run only the $100 sequence, state the $80 item.</a:t>
             </a:r>
             <a:endParaRPr lang="en-US" sz="1200"/>
           </a:p>
@@ -5856,7 +5810,7 @@
                 <a:ea typeface="Arial"/>
                 <a:cs typeface="Arial"/>
               </a:rPr>
-              <a:t xml:space="preserve">Zero: the wrong base persists. One: the right number, no explanation. Two: the learner explains the current amount. Help goes in its own column so a human can read it, and asking a question costs nothing. Try the rubric on sample work before it touches a grade.</a:t>
+              <a:t xml:space="preserve">Zero: the wrong base persists. One: the right number, no explanation. Two: the learner explains the current amount. Help goes in its own column so a human can read it, and asking a question costs nothing.</a:t>
             </a:r>
             <a:endParaRPr lang="en-US" sz="1200"/>
           </a:p>
@@ -6040,7 +5994,7 @@
                 <a:ea typeface="Arial"/>
                 <a:cs typeface="Arial"/>
               </a:rPr>
-              <a:t xml:space="preserve">Bastani et al. (2025), [Generative AI without guardrails can harm learning](https://doi.org/10.1073/pnas.2422633122), PNAS. A [correction](https://doi.org/10.1073/pnas.2518204122) exists; check it before quoting figures.</a:t>
+              <a:t xml:space="preserve">Bastani et al. (2025), [Generative AI without guardrails can harm learning](https://doi.org/10.1073/pnas.2422633122), PNAS. The [correction](https://doi.org/10.1073/pnas.2518204122) (August 2025) fixes an author affiliation; no result changed.</a:t>
             </a:r>
             <a:endParaRPr lang="en-US" sz="1200"/>
           </a:p>
@@ -6521,7 +6475,7 @@
                 <a:ea typeface="Arial"/>
                 <a:cs typeface="Arial"/>
               </a:rPr>
-              <a:t xml:space="preserve">Answering from memory and reading a model's output aloud produce different mistakes. The reader falls behind as the text wraps and jumps. They mispronounce a word they'd never have chosen. Spoken language carries enough tells to sort likely from unlikely, never to convict.</a:t>
+              <a:t xml:space="preserve">Answering from memory and reading a model's output aloud produce different mistakes. The reader falls behind as the text wraps and jumps. They mispronounce a word they'd never have chosen. Spoken language carries enough tells to sort likely from unlikely.</a:t>
             </a:r>
             <a:endParaRPr lang="en-US" sz="1200"/>
           </a:p>
@@ -7363,30 +7317,7 @@
                 <a:ea typeface="Arial"/>
                 <a:cs typeface="Arial"/>
               </a:rPr>
-              <a:t xml:space="preserve">Outsmart move three: count AI time, then read</a:t>
-            </a:r>
-            <a:endParaRPr lang="en-US" sz="3900"/>
-          </a:p>
-          <a:p>
-            <a:pPr marL="0" indent="0">
-              <a:lnSpc>
-                <a:spcPts val="4680"/>
-              </a:lnSpc>
-              <a:spcAft>
-                <a:spcPts val="0"/>
-              </a:spcAft>
-              <a:buNone/>
-            </a:pPr>
-            <a:r>
-              <a:rPr lang="en-US" sz="3900" b="1">
-                <a:solidFill>
-                  <a:srgbClr val="F5F1E9"/>
-                </a:solidFill>
-                <a:latin typeface="Arial"/>
-                <a:ea typeface="Arial"/>
-                <a:cs typeface="Arial"/>
-              </a:rPr>
-              <a:t xml:space="preserve">all 300 transcripts</a:t>
+              <a:t xml:space="preserve">Outsmart move three: read all 300 transcripts</a:t>
             </a:r>
             <a:endParaRPr lang="en-US" sz="3900"/>
           </a:p>
@@ -10087,7 +10018,7 @@
                 <a:ea typeface="Arial"/>
                 <a:cs typeface="Arial"/>
               </a:rPr>
-              <a:t xml:space="preserve">Write down where the foundations happen</a:t>
+              <a:t xml:space="preserve">Pencil first. Then the tool</a:t>
             </a:r>
             <a:endParaRPr lang="en-US" sz="3900"/>
           </a:p>
@@ -11598,7 +11529,7 @@
                 <a:ea typeface="Arial"/>
                 <a:cs typeface="Arial"/>
               </a:rPr>
-              <a:t xml:space="preserve">Ask for an attempt, then ration the help</a:t>
+              <a:t xml:space="preserve">Ration the help</a:t>
             </a:r>
             <a:endParaRPr lang="en-US" sz="3900"/>
           </a:p>
@@ -12069,7 +12000,7 @@
                 <a:ea typeface="Arial"/>
                 <a:cs typeface="Arial"/>
               </a:rPr>
-              <a:t xml:space="preserve">Demo: the four-minute reconstruction</a:t>
+              <a:t xml:space="preserve">Demo: four minutes inside a five-minute slide</a:t>
             </a:r>
             <a:endParaRPr lang="en-US" sz="3900"/>
           </a:p>
@@ -12494,30 +12425,7 @@
                 <a:ea typeface="Arial"/>
                 <a:cs typeface="Arial"/>
               </a:rPr>
-              <a:t xml:space="preserve">Score the reasoning, then write down what you</a:t>
-            </a:r>
-            <a:endParaRPr lang="en-US" sz="3900"/>
-          </a:p>
-          <a:p>
-            <a:pPr marL="0" indent="0">
-              <a:lnSpc>
-                <a:spcPts val="4680"/>
-              </a:lnSpc>
-              <a:spcAft>
-                <a:spcPts val="0"/>
-              </a:spcAft>
-              <a:buNone/>
-            </a:pPr>
-            <a:r>
-              <a:rPr lang="en-US" sz="3900" b="1">
-                <a:solidFill>
-                  <a:srgbClr val="F5F1E9"/>
-                </a:solidFill>
-                <a:latin typeface="Arial"/>
-                <a:ea typeface="Arial"/>
-                <a:cs typeface="Arial"/>
-              </a:rPr>
-              <a:t xml:space="preserve">saw</a:t>
+              <a:t xml:space="preserve">Score the reasoning. Write it down</a:t>
             </a:r>
             <a:endParaRPr lang="en-US" sz="3900"/>
           </a:p>

--- a/artifacts/speaking-portfolio-expanded/decks/evidence-learning-30min-screen.pptx
+++ b/artifacts/speaking-portfolio-expanded/decks/evidence-learning-30min-screen.pptx
@@ -632,7 +632,7 @@
                 <a:ea typeface="Arial"/>
                 <a:cs typeface="Arial"/>
               </a:rPr>
-              <a:t xml:space="preserve">Source slide 10. 20:30 to 22:30</a:t>
+              <a:t xml:space="preserve">Source slide 10. 20:00 to 22:00</a:t>
             </a:r>
             <a:endParaRPr lang="en-US" sz="1200"/>
           </a:p>
@@ -908,52 +908,6 @@
                 <a:ea typeface="Arial"/>
                 <a:cs typeface="Arial"/>
               </a:rPr>
-              <a:t xml:space="preserve">And know what you are up against when you read the model's summary instead of the transcript. Skitka and colleagues measured it in 1999: people given a highly but imperfectly reliable aid did worse than people with no aid at all on the trials where the aid was wrong, because it is right often enough that you stop checking. The summary is a place to start looking, never a place to stop.</a:t>
-            </a:r>
-            <a:endParaRPr lang="en-US" sz="1200"/>
-          </a:p>
-          <a:p>
-            <a:pPr marL="0" indent="0">
-              <a:lnSpc>
-                <a:spcPts val="1560"/>
-              </a:lnSpc>
-              <a:spcAft>
-                <a:spcPts val="0"/>
-              </a:spcAft>
-              <a:buNone/>
-            </a:pPr>
-            <a:r>
-              <a:rPr lang="en-US" sz="1200" b="0">
-                <a:solidFill>
-                  <a:srgbClr val="202b33"/>
-                </a:solidFill>
-                <a:latin typeface="Arial"/>
-                <a:ea typeface="Arial"/>
-                <a:cs typeface="Arial"/>
-              </a:rPr>
-              <a:t xml:space="preserve"/>
-            </a:r>
-            <a:endParaRPr lang="en-US" sz="1200"/>
-          </a:p>
-          <a:p>
-            <a:pPr marL="0" indent="0">
-              <a:lnSpc>
-                <a:spcPts val="1560"/>
-              </a:lnSpc>
-              <a:spcAft>
-                <a:spcPts val="0"/>
-              </a:spcAft>
-              <a:buNone/>
-            </a:pPr>
-            <a:r>
-              <a:rPr lang="en-US" sz="1200" b="0">
-                <a:solidFill>
-                  <a:srgbClr val="202b33"/>
-                </a:solidFill>
-                <a:latin typeface="Arial"/>
-                <a:ea typeface="Arial"/>
-                <a:cs typeface="Arial"/>
-              </a:rPr>
               <a:t xml:space="preserve">Skitka, Mosier and Burdick (1999), [Does automation bias decision-making?](https://doi.org/10.1006/ijhc.1999.0252), International Journal of Human-Computer Studies 51(5), 991 to 1006.</a:t>
             </a:r>
             <a:endParaRPr lang="en-US" sz="1200"/>
@@ -1092,7 +1046,7 @@
                 <a:ea typeface="Arial"/>
                 <a:cs typeface="Arial"/>
               </a:rPr>
-              <a:t xml:space="preserve"/>
+              <a:t xml:space="preserve">Bridge: know what you are up against when you read a model's summary instead of the transcripts.</a:t>
             </a:r>
             <a:endParaRPr lang="en-US" sz="1200"/>
           </a:p>
@@ -1205,7 +1159,7 @@
                 <a:ea typeface="Arial"/>
                 <a:cs typeface="Arial"/>
               </a:rPr>
-              <a:t xml:space="preserve">Source slide 11. 22:30 to 24:30</a:t>
+              <a:t xml:space="preserve">Source slide 11. 22:00 to 25:00</a:t>
             </a:r>
             <a:endParaRPr lang="en-US" sz="1200"/>
           </a:p>
@@ -1686,7 +1640,7 @@
                 <a:ea typeface="Arial"/>
                 <a:cs typeface="Arial"/>
               </a:rPr>
-              <a:t xml:space="preserve">Source slide 13. 24:30 to 28:00</a:t>
+              <a:t xml:space="preserve">Source slide 13. 25:00 to 28:00</a:t>
             </a:r>
             <a:endParaRPr lang="en-US" sz="1200"/>
           </a:p>
@@ -3497,52 +3451,6 @@
                 <a:ea typeface="Arial"/>
                 <a:cs typeface="Arial"/>
               </a:rPr>
-              <a:t xml:space="preserve">This tension is older than the panic and it has a name. Koedinger and Aleven called it the assistance dilemma in 2007: give too much help and the learner never has to generate anything, give too little and they stall out. Nobody has solved it. Say that out loud, because a vendor whose tutor has the help level exactly right is selling you a solved version of an open problem.</a:t>
-            </a:r>
-            <a:endParaRPr lang="en-US" sz="1200"/>
-          </a:p>
-          <a:p>
-            <a:pPr marL="0" indent="0">
-              <a:lnSpc>
-                <a:spcPts val="1560"/>
-              </a:lnSpc>
-              <a:spcAft>
-                <a:spcPts val="0"/>
-              </a:spcAft>
-              <a:buNone/>
-            </a:pPr>
-            <a:r>
-              <a:rPr lang="en-US" sz="1200" b="0">
-                <a:solidFill>
-                  <a:srgbClr val="202b33"/>
-                </a:solidFill>
-                <a:latin typeface="Arial"/>
-                <a:ea typeface="Arial"/>
-                <a:cs typeface="Arial"/>
-              </a:rPr>
-              <a:t xml:space="preserve"/>
-            </a:r>
-            <a:endParaRPr lang="en-US" sz="1200"/>
-          </a:p>
-          <a:p>
-            <a:pPr marL="0" indent="0">
-              <a:lnSpc>
-                <a:spcPts val="1560"/>
-              </a:lnSpc>
-              <a:spcAft>
-                <a:spcPts val="0"/>
-              </a:spcAft>
-              <a:buNone/>
-            </a:pPr>
-            <a:r>
-              <a:rPr lang="en-US" sz="1200" b="0">
-                <a:solidFill>
-                  <a:srgbClr val="202b33"/>
-                </a:solidFill>
-                <a:latin typeface="Arial"/>
-                <a:ea typeface="Arial"/>
-                <a:cs typeface="Arial"/>
-              </a:rPr>
               <a:t xml:space="preserve">Koedinger and Aleven (2007), [Exploring the Assistance Dilemma in Experiments with Cognitive Tutors](https://doi.org/10.1007/s10648-007-9049-0), Educational Psychology Review 19(3), 239 to 264.</a:t>
             </a:r>
             <a:endParaRPr lang="en-US" sz="1200"/>
@@ -3681,7 +3589,7 @@
                 <a:ea typeface="Arial"/>
                 <a:cs typeface="Arial"/>
               </a:rPr>
-              <a:t xml:space="preserve"/>
+              <a:t xml:space="preserve">Bridge: Koedinger and Aleven called this the assistance dilemma in 2007 - too much help and they coast, too little and they flounder - and nobody has closed it.</a:t>
             </a:r>
             <a:endParaRPr lang="en-US" sz="1200"/>
           </a:p>
@@ -5191,7 +5099,7 @@
                 <a:ea typeface="Arial"/>
                 <a:cs typeface="Arial"/>
               </a:rPr>
-              <a:t xml:space="preserve">Source slide 7. 11:00 to 15:30</a:t>
+              <a:t xml:space="preserve">Source slide 7. 11:00 to 15:00</a:t>
             </a:r>
             <a:endParaRPr lang="en-US" sz="1200"/>
           </a:p>
@@ -5626,7 +5534,7 @@
                 <a:ea typeface="Arial"/>
                 <a:cs typeface="Arial"/>
               </a:rPr>
-              <a:t xml:space="preserve">Source slide 8. 15:30 to 18:00</a:t>
+              <a:t xml:space="preserve">Source slide 8. 15:00 to 17:30</a:t>
             </a:r>
             <a:endParaRPr lang="en-US" sz="1200"/>
           </a:p>
@@ -5948,52 +5856,6 @@
                 <a:ea typeface="Arial"/>
                 <a:cs typeface="Arial"/>
               </a:rPr>
-              <a:t xml:space="preserve">And that finding is not news, which is the useful part. Soderstrom and Bjork reviewed fifty years of it in 2015: how well someone performs while being helped and how much they actually learned come apart routinely, and the conditions that flatter practice frequently damage retention. A tutor is a machine for removing difficulty. Some of that difficulty was the part where they learned. None of this convicts anyone; your integrity process stays where it is. This is the last time I'll say that.</a:t>
-            </a:r>
-            <a:endParaRPr lang="en-US" sz="1200"/>
-          </a:p>
-          <a:p>
-            <a:pPr marL="0" indent="0">
-              <a:lnSpc>
-                <a:spcPts val="1560"/>
-              </a:lnSpc>
-              <a:spcAft>
-                <a:spcPts val="0"/>
-              </a:spcAft>
-              <a:buNone/>
-            </a:pPr>
-            <a:r>
-              <a:rPr lang="en-US" sz="1200" b="0">
-                <a:solidFill>
-                  <a:srgbClr val="202b33"/>
-                </a:solidFill>
-                <a:latin typeface="Arial"/>
-                <a:ea typeface="Arial"/>
-                <a:cs typeface="Arial"/>
-              </a:rPr>
-              <a:t xml:space="preserve"/>
-            </a:r>
-            <a:endParaRPr lang="en-US" sz="1200"/>
-          </a:p>
-          <a:p>
-            <a:pPr marL="0" indent="0">
-              <a:lnSpc>
-                <a:spcPts val="1560"/>
-              </a:lnSpc>
-              <a:spcAft>
-                <a:spcPts val="0"/>
-              </a:spcAft>
-              <a:buNone/>
-            </a:pPr>
-            <a:r>
-              <a:rPr lang="en-US" sz="1200" b="0">
-                <a:solidFill>
-                  <a:srgbClr val="202b33"/>
-                </a:solidFill>
-                <a:latin typeface="Arial"/>
-                <a:ea typeface="Arial"/>
-                <a:cs typeface="Arial"/>
-              </a:rPr>
               <a:t xml:space="preserve">Bastani et al. (2025), [Generative AI without guardrails can harm learning](https://doi.org/10.1073/pnas.2422633122), PNAS. The [correction](https://doi.org/10.1073/pnas.2518204122) (August 2025) fixes an author affiliation; no result changed.</a:t>
             </a:r>
             <a:endParaRPr lang="en-US" sz="1200"/>
@@ -6178,7 +6040,7 @@
                 <a:ea typeface="Arial"/>
                 <a:cs typeface="Arial"/>
               </a:rPr>
-              <a:t xml:space="preserve"/>
+              <a:t xml:space="preserve">Bridge: Soderstrom and Bjork reviewed fifty years of evidence that performance during practice and learning that lasts come apart routinely; supported and unaided go in separate columns.</a:t>
             </a:r>
             <a:endParaRPr lang="en-US" sz="1200"/>
           </a:p>
@@ -6291,7 +6153,7 @@
                 <a:ea typeface="Arial"/>
                 <a:cs typeface="Arial"/>
               </a:rPr>
-              <a:t xml:space="preserve">Source slide 9. 18:00 to 20:30</a:t>
+              <a:t xml:space="preserve">Source slide 9. 17:30 to 20:00</a:t>
             </a:r>
             <a:endParaRPr lang="en-US" sz="1200"/>
           </a:p>
